--- a/192572047__AARTHI SREE__CO1.pptx
+++ b/192572047__AARTHI SREE__CO1.pptx
@@ -8,8 +8,7 @@
     <p:sldId id="259" r:id="rId2"/>
     <p:sldId id="257" r:id="rId3"/>
     <p:sldId id="258" r:id="rId4"/>
-    <p:sldId id="260" r:id="rId5"/>
-    <p:sldId id="261" r:id="rId6"/>
+    <p:sldId id="261" r:id="rId5"/>
   </p:sldIdLst>
   <p:sldSz cx="12192000" cy="6858000"/>
   <p:notesSz cx="6858000" cy="9144000"/>
@@ -108,6 +107,11 @@
       </a:defRPr>
     </a:lvl9pPr>
   </p:defaultTextStyle>
+  <p:extLst>
+    <p:ext uri="{EFAFB233-063F-42B5-8137-9DF3F51BA10A}">
+      <p15:sldGuideLst xmlns:p15="http://schemas.microsoft.com/office/powerpoint/2012/main"/>
+    </p:ext>
+  </p:extLst>
 </p:presentation>
 </file>
 
@@ -573,7 +577,7 @@
           <a:p>
             <a:fld id="{DDA51639-B2D6-4652-B8C3-1B4C224A7BAF}" type="datetimeFigureOut">
               <a:rPr lang="en-US" dirty="0"/>
-              <a:t>7/28/2026</a:t>
+              <a:t>7/29/2026</a:t>
             </a:fld>
             <a:endParaRPr lang="en-US" dirty="0"/>
           </a:p>
@@ -771,7 +775,7 @@
           <a:p>
             <a:fld id="{D11A6AA8-A04B-4104-9AE2-BD48D340E27F}" type="datetimeFigureOut">
               <a:rPr lang="en-US" dirty="0"/>
-              <a:t>7/28/2026</a:t>
+              <a:t>7/29/2026</a:t>
             </a:fld>
             <a:endParaRPr lang="en-US" dirty="0"/>
           </a:p>
@@ -946,7 +950,7 @@
           <a:p>
             <a:fld id="{B4E0BF79-FAC6-4A96-8DE1-F7B82E2E1652}" type="datetimeFigureOut">
               <a:rPr lang="en-US" dirty="0"/>
-              <a:t>7/28/2026</a:t>
+              <a:t>7/29/2026</a:t>
             </a:fld>
             <a:endParaRPr lang="en-US" dirty="0"/>
           </a:p>
@@ -1111,7 +1115,7 @@
           <a:p>
             <a:fld id="{82FF5DD9-2C52-442D-92E2-8072C0C3D7CD}" type="datetimeFigureOut">
               <a:rPr lang="en-US" dirty="0"/>
-              <a:t>7/28/2026</a:t>
+              <a:t>7/29/2026</a:t>
             </a:fld>
             <a:endParaRPr lang="en-US" dirty="0"/>
           </a:p>
@@ -1678,7 +1682,7 @@
           <a:p>
             <a:fld id="{C44961B7-6B89-48AB-966F-622E2788EECC}" type="datetimeFigureOut">
               <a:rPr lang="en-US" dirty="0"/>
-              <a:t>7/28/2026</a:t>
+              <a:t>7/29/2026</a:t>
             </a:fld>
             <a:endParaRPr lang="en-US" dirty="0"/>
           </a:p>
@@ -1975,7 +1979,7 @@
           <a:p>
             <a:fld id="{DBD3D6FB-79CC-4683-A046-BBE785BA1BED}" type="datetimeFigureOut">
               <a:rPr lang="en-US" dirty="0"/>
-              <a:t>7/28/2026</a:t>
+              <a:t>7/29/2026</a:t>
             </a:fld>
             <a:endParaRPr lang="en-US" dirty="0"/>
           </a:p>
@@ -2407,7 +2411,7 @@
           <a:p>
             <a:fld id="{9512B3E8-48F1-4B23-8498-D8A04A81EC9C}" type="datetimeFigureOut">
               <a:rPr lang="en-US" dirty="0"/>
-              <a:t>7/28/2026</a:t>
+              <a:t>7/29/2026</a:t>
             </a:fld>
             <a:endParaRPr lang="en-US" dirty="0"/>
           </a:p>
@@ -2520,7 +2524,7 @@
           <a:p>
             <a:fld id="{10B90D90-AA62-404D-A741-635B4370F9CB}" type="datetimeFigureOut">
               <a:rPr lang="en-US" dirty="0"/>
-              <a:t>7/28/2026</a:t>
+              <a:t>7/29/2026</a:t>
             </a:fld>
             <a:endParaRPr lang="en-US" dirty="0"/>
           </a:p>
@@ -2610,7 +2614,7 @@
           <a:p>
             <a:fld id="{A57002E4-6836-46D1-9DBB-3C27C0DD3A89}" type="datetimeFigureOut">
               <a:rPr lang="en-US" dirty="0"/>
-              <a:t>7/28/2026</a:t>
+              <a:t>7/29/2026</a:t>
             </a:fld>
             <a:endParaRPr lang="en-US" dirty="0"/>
           </a:p>
@@ -2987,7 +2991,7 @@
           <a:p>
             <a:fld id="{1CF131DD-A141-4471-BCF9-C6073EDD7E20}" type="datetimeFigureOut">
               <a:rPr lang="en-US" dirty="0"/>
-              <a:t>7/28/2026</a:t>
+              <a:t>7/29/2026</a:t>
             </a:fld>
             <a:endParaRPr lang="en-US" dirty="0"/>
           </a:p>
@@ -3377,7 +3381,7 @@
           <a:p>
             <a:fld id="{AB334A90-EB03-42F3-8859-2C2B2724C058}" type="datetimeFigureOut">
               <a:rPr lang="en-US" dirty="0"/>
-              <a:t>7/28/2026</a:t>
+              <a:t>7/29/2026</a:t>
             </a:fld>
             <a:endParaRPr lang="en-US" dirty="0"/>
           </a:p>
@@ -3686,7 +3690,7 @@
           <a:p>
             <a:fld id="{CBC48EC7-AF6A-48D3-8284-14BACBEBDD84}" type="datetimeFigureOut">
               <a:rPr lang="en-US" dirty="0"/>
-              <a:t>7/28/2026</a:t>
+              <a:t>7/29/2026</a:t>
             </a:fld>
             <a:endParaRPr lang="en-US" dirty="0"/>
           </a:p>
@@ -4777,36 +4781,6 @@
           <a:chExt cx="0" cy="0"/>
         </a:xfrm>
       </p:grpSpPr>
-    </p:spTree>
-    <p:extLst>
-      <p:ext uri="{BB962C8B-B14F-4D97-AF65-F5344CB8AC3E}">
-        <p14:creationId xmlns:p14="http://schemas.microsoft.com/office/powerpoint/2010/main" val="361849057"/>
-      </p:ext>
-    </p:extLst>
-  </p:cSld>
-  <p:clrMapOvr>
-    <a:masterClrMapping/>
-  </p:clrMapOvr>
-</p:sld>
-</file>
-
-<file path=ppt/slides/slide5.xml><?xml version="1.0" encoding="utf-8"?>
-<p:sld xmlns:a="http://schemas.openxmlformats.org/drawingml/2006/main" xmlns:r="http://schemas.openxmlformats.org/officeDocument/2006/relationships" xmlns:p="http://schemas.openxmlformats.org/presentationml/2006/main">
-  <p:cSld>
-    <p:spTree>
-      <p:nvGrpSpPr>
-        <p:cNvPr id="1" name=""/>
-        <p:cNvGrpSpPr/>
-        <p:nvPr/>
-      </p:nvGrpSpPr>
-      <p:grpSpPr>
-        <a:xfrm>
-          <a:off x="0" y="0"/>
-          <a:ext cx="0" cy="0"/>
-          <a:chOff x="0" y="0"/>
-          <a:chExt cx="0" cy="0"/>
-        </a:xfrm>
-      </p:grpSpPr>
       <p:sp>
         <p:nvSpPr>
           <p:cNvPr id="2" name="Title 1">
@@ -4837,31 +4811,6 @@
             <a:endParaRPr lang="en-IN" dirty="0">
               <a:latin typeface="Algerian" panose="04020705040A02060702" pitchFamily="82" charset="0"/>
             </a:endParaRPr>
-          </a:p>
-        </p:txBody>
-      </p:sp>
-      <p:sp>
-        <p:nvSpPr>
-          <p:cNvPr id="3" name="Subtitle 2">
-            <a:extLst>
-              <a:ext uri="{FF2B5EF4-FFF2-40B4-BE49-F238E27FC236}">
-                <a16:creationId xmlns:a16="http://schemas.microsoft.com/office/drawing/2014/main" id="{9FFCC8D0-4584-534F-0A53-BFF84401EA82}"/>
-              </a:ext>
-            </a:extLst>
-          </p:cNvPr>
-          <p:cNvSpPr>
-            <a:spLocks noGrp="1"/>
-          </p:cNvSpPr>
-          <p:nvPr>
-            <p:ph type="subTitle" idx="1"/>
-          </p:nvPr>
-        </p:nvSpPr>
-        <p:spPr/>
-        <p:txBody>
-          <a:bodyPr/>
-          <a:lstStyle/>
-          <a:p>
-            <a:endParaRPr lang="en-IN"/>
           </a:p>
         </p:txBody>
       </p:sp>
